--- a/03-build/pptx/C4_U10_docente.pptx
+++ b/03-build/pptx/C4_U10_docente.pptx
@@ -5013,7 +5013,6 @@
               <a:srgbClr val="E4E3DE"/>
             </a:solidFill>
           </a:ln>
-          <a:effectLst/>
           <a:effectLst>
             <a:outerShdw blurRad="90000" dist="38000" dir="5400000" rotWithShape="0">
               <a:srgbClr val="20242E">
@@ -6452,7 +6451,6 @@
               <a:srgbClr val="D64550"/>
             </a:solidFill>
           </a:ln>
-          <a:effectLst/>
           <a:effectLst>
             <a:outerShdw blurRad="90000" dist="38000" dir="5400000" rotWithShape="0">
               <a:srgbClr val="20242E">
@@ -6640,7 +6638,6 @@
               <a:srgbClr val="E4E3DE"/>
             </a:solidFill>
           </a:ln>
-          <a:effectLst/>
           <a:effectLst>
             <a:outerShdw blurRad="90000" dist="38000" dir="5400000" rotWithShape="0">
               <a:srgbClr val="20242E">
@@ -7387,7 +7384,6 @@
               <a:srgbClr val="E4E3DE"/>
             </a:solidFill>
           </a:ln>
-          <a:effectLst/>
           <a:effectLst>
             <a:outerShdw blurRad="90000" dist="38000" dir="5400000" rotWithShape="0">
               <a:srgbClr val="20242E">
@@ -7531,7 +7527,6 @@
               <a:srgbClr val="E4E3DE"/>
             </a:solidFill>
           </a:ln>
-          <a:effectLst/>
           <a:effectLst>
             <a:outerShdw blurRad="90000" dist="38000" dir="5400000" rotWithShape="0">
               <a:srgbClr val="20242E">
@@ -7675,7 +7670,6 @@
               <a:srgbClr val="E4E3DE"/>
             </a:solidFill>
           </a:ln>
-          <a:effectLst/>
           <a:effectLst>
             <a:outerShdw blurRad="90000" dist="38000" dir="5400000" rotWithShape="0">
               <a:srgbClr val="20242E">
@@ -7819,7 +7813,6 @@
               <a:srgbClr val="E4E3DE"/>
             </a:solidFill>
           </a:ln>
-          <a:effectLst/>
           <a:effectLst>
             <a:outerShdw blurRad="90000" dist="38000" dir="5400000" rotWithShape="0">
               <a:srgbClr val="20242E">
@@ -7963,7 +7956,6 @@
               <a:srgbClr val="E4E3DE"/>
             </a:solidFill>
           </a:ln>
-          <a:effectLst/>
           <a:effectLst>
             <a:outerShdw blurRad="90000" dist="38000" dir="5400000" rotWithShape="0">
               <a:srgbClr val="20242E">
@@ -8107,7 +8099,6 @@
               <a:srgbClr val="E4E3DE"/>
             </a:solidFill>
           </a:ln>
-          <a:effectLst/>
           <a:effectLst>
             <a:outerShdw blurRad="90000" dist="38000" dir="5400000" rotWithShape="0">
               <a:srgbClr val="20242E">
@@ -8251,7 +8242,6 @@
               <a:srgbClr val="D64550"/>
             </a:solidFill>
           </a:ln>
-          <a:effectLst/>
           <a:effectLst>
             <a:outerShdw blurRad="90000" dist="38000" dir="5400000" rotWithShape="0">
               <a:srgbClr val="20242E">
@@ -8946,7 +8936,6 @@
               <a:srgbClr val="D64550"/>
             </a:solidFill>
           </a:ln>
-          <a:effectLst/>
           <a:effectLst>
             <a:outerShdw blurRad="90000" dist="38000" dir="5400000" rotWithShape="0">
               <a:srgbClr val="20242E">
@@ -10206,7 +10195,6 @@
               <a:srgbClr val="D64550"/>
             </a:solidFill>
           </a:ln>
-          <a:effectLst/>
           <a:effectLst>
             <a:outerShdw blurRad="90000" dist="38000" dir="5400000" rotWithShape="0">
               <a:srgbClr val="20242E">
@@ -10448,7 +10436,6 @@
               <a:srgbClr val="E4E3DE"/>
             </a:solidFill>
           </a:ln>
-          <a:effectLst/>
           <a:effectLst>
             <a:outerShdw blurRad="90000" dist="38000" dir="5400000" rotWithShape="0">
               <a:srgbClr val="20242E">
@@ -11151,7 +11138,6 @@
               <a:srgbClr val="E4E3DE"/>
             </a:solidFill>
           </a:ln>
-          <a:effectLst/>
           <a:effectLst>
             <a:outerShdw blurRad="90000" dist="38000" dir="5400000" rotWithShape="0">
               <a:srgbClr val="20242E">
@@ -11305,7 +11291,6 @@
               <a:srgbClr val="E4E3DE"/>
             </a:solidFill>
           </a:ln>
-          <a:effectLst/>
           <a:effectLst>
             <a:outerShdw blurRad="90000" dist="38000" dir="5400000" rotWithShape="0">
               <a:srgbClr val="20242E">
@@ -11459,7 +11444,6 @@
               <a:srgbClr val="E4E3DE"/>
             </a:solidFill>
           </a:ln>
-          <a:effectLst/>
           <a:effectLst>
             <a:outerShdw blurRad="90000" dist="38000" dir="5400000" rotWithShape="0">
               <a:srgbClr val="20242E">
@@ -11613,7 +11597,6 @@
               <a:srgbClr val="E4E3DE"/>
             </a:solidFill>
           </a:ln>
-          <a:effectLst/>
           <a:effectLst>
             <a:outerShdw blurRad="90000" dist="38000" dir="5400000" rotWithShape="0">
               <a:srgbClr val="20242E">
@@ -11767,7 +11750,6 @@
               <a:srgbClr val="E4E3DE"/>
             </a:solidFill>
           </a:ln>
-          <a:effectLst/>
           <a:effectLst>
             <a:outerShdw blurRad="90000" dist="38000" dir="5400000" rotWithShape="0">
               <a:srgbClr val="20242E">
@@ -11921,7 +11903,6 @@
               <a:srgbClr val="E4E3DE"/>
             </a:solidFill>
           </a:ln>
-          <a:effectLst/>
           <a:effectLst>
             <a:outerShdw blurRad="90000" dist="38000" dir="5400000" rotWithShape="0">
               <a:srgbClr val="20242E">
@@ -12075,7 +12056,6 @@
               <a:srgbClr val="E4E3DE"/>
             </a:solidFill>
           </a:ln>
-          <a:effectLst/>
           <a:effectLst>
             <a:outerShdw blurRad="90000" dist="38000" dir="5400000" rotWithShape="0">
               <a:srgbClr val="20242E">
@@ -12229,7 +12209,6 @@
               <a:srgbClr val="E4E3DE"/>
             </a:solidFill>
           </a:ln>
-          <a:effectLst/>
           <a:effectLst>
             <a:outerShdw blurRad="90000" dist="38000" dir="5400000" rotWithShape="0">
               <a:srgbClr val="20242E">
@@ -12383,7 +12362,6 @@
               <a:srgbClr val="E4E3DE"/>
             </a:solidFill>
           </a:ln>
-          <a:effectLst/>
           <a:effectLst>
             <a:outerShdw blurRad="90000" dist="38000" dir="5400000" rotWithShape="0">
               <a:srgbClr val="20242E">
@@ -12537,7 +12515,6 @@
               <a:srgbClr val="E4E3DE"/>
             </a:solidFill>
           </a:ln>
-          <a:effectLst/>
           <a:effectLst>
             <a:outerShdw blurRad="90000" dist="38000" dir="5400000" rotWithShape="0">
               <a:srgbClr val="20242E">
@@ -12691,7 +12668,6 @@
               <a:srgbClr val="E4E3DE"/>
             </a:solidFill>
           </a:ln>
-          <a:effectLst/>
           <a:effectLst>
             <a:outerShdw blurRad="90000" dist="38000" dir="5400000" rotWithShape="0">
               <a:srgbClr val="20242E">
@@ -12845,7 +12821,6 @@
               <a:srgbClr val="E4E3DE"/>
             </a:solidFill>
           </a:ln>
-          <a:effectLst/>
           <a:effectLst>
             <a:outerShdw blurRad="90000" dist="38000" dir="5400000" rotWithShape="0">
               <a:srgbClr val="20242E">
@@ -12999,7 +12974,6 @@
               <a:srgbClr val="E4E3DE"/>
             </a:solidFill>
           </a:ln>
-          <a:effectLst/>
           <a:effectLst>
             <a:outerShdw blurRad="90000" dist="38000" dir="5400000" rotWithShape="0">
               <a:srgbClr val="20242E">
@@ -13153,7 +13127,6 @@
               <a:srgbClr val="E4E3DE"/>
             </a:solidFill>
           </a:ln>
-          <a:effectLst/>
           <a:effectLst>
             <a:outerShdw blurRad="90000" dist="38000" dir="5400000" rotWithShape="0">
               <a:srgbClr val="20242E">
@@ -13307,7 +13280,6 @@
               <a:srgbClr val="E4E3DE"/>
             </a:solidFill>
           </a:ln>
-          <a:effectLst/>
           <a:effectLst>
             <a:outerShdw blurRad="90000" dist="38000" dir="5400000" rotWithShape="0">
               <a:srgbClr val="20242E">
@@ -13461,7 +13433,6 @@
               <a:srgbClr val="E4E3DE"/>
             </a:solidFill>
           </a:ln>
-          <a:effectLst/>
           <a:effectLst>
             <a:outerShdw blurRad="90000" dist="38000" dir="5400000" rotWithShape="0">
               <a:srgbClr val="20242E">
@@ -13615,7 +13586,6 @@
               <a:srgbClr val="E4E3DE"/>
             </a:solidFill>
           </a:ln>
-          <a:effectLst/>
           <a:effectLst>
             <a:outerShdw blurRad="90000" dist="38000" dir="5400000" rotWithShape="0">
               <a:srgbClr val="20242E">
@@ -13769,7 +13739,6 @@
               <a:srgbClr val="E4E3DE"/>
             </a:solidFill>
           </a:ln>
-          <a:effectLst/>
           <a:effectLst>
             <a:outerShdw blurRad="90000" dist="38000" dir="5400000" rotWithShape="0">
               <a:srgbClr val="20242E">
@@ -13923,7 +13892,6 @@
               <a:srgbClr val="E4E3DE"/>
             </a:solidFill>
           </a:ln>
-          <a:effectLst/>
           <a:effectLst>
             <a:outerShdw blurRad="90000" dist="38000" dir="5400000" rotWithShape="0">
               <a:srgbClr val="20242E">
@@ -14077,7 +14045,6 @@
               <a:srgbClr val="D64550"/>
             </a:solidFill>
           </a:ln>
-          <a:effectLst/>
           <a:effectLst>
             <a:outerShdw blurRad="90000" dist="38000" dir="5400000" rotWithShape="0">
               <a:srgbClr val="20242E">
@@ -14231,7 +14198,6 @@
               <a:srgbClr val="D64550"/>
             </a:solidFill>
           </a:ln>
-          <a:effectLst/>
           <a:effectLst>
             <a:outerShdw blurRad="90000" dist="38000" dir="5400000" rotWithShape="0">
               <a:srgbClr val="20242E">
@@ -14385,7 +14351,6 @@
               <a:srgbClr val="D64550"/>
             </a:solidFill>
           </a:ln>
-          <a:effectLst/>
           <a:effectLst>
             <a:outerShdw blurRad="90000" dist="38000" dir="5400000" rotWithShape="0">
               <a:srgbClr val="20242E">
@@ -15022,7 +14987,6 @@
               <a:srgbClr val="E4E3DE"/>
             </a:solidFill>
           </a:ln>
-          <a:effectLst/>
           <a:effectLst>
             <a:outerShdw blurRad="90000" dist="38000" dir="5400000" rotWithShape="0">
               <a:srgbClr val="20242E">
@@ -15320,7 +15284,6 @@
               <a:srgbClr val="DC2626"/>
             </a:solidFill>
           </a:ln>
-          <a:effectLst/>
           <a:effectLst>
             <a:outerShdw blurRad="90000" dist="38000" dir="5400000" rotWithShape="0">
               <a:srgbClr val="20242E">
@@ -15523,7 +15486,6 @@
               <a:srgbClr val="D64550"/>
             </a:solidFill>
           </a:ln>
-          <a:effectLst/>
           <a:effectLst>
             <a:outerShdw blurRad="90000" dist="38000" dir="5400000" rotWithShape="0">
               <a:srgbClr val="20242E">
@@ -17103,7 +17065,6 @@
               <a:srgbClr val="E4E3DE"/>
             </a:solidFill>
           </a:ln>
-          <a:effectLst/>
           <a:effectLst>
             <a:outerShdw blurRad="90000" dist="38000" dir="5400000" rotWithShape="0">
               <a:srgbClr val="20242E">
@@ -17272,7 +17233,6 @@
               <a:srgbClr val="E4E3DE"/>
             </a:solidFill>
           </a:ln>
-          <a:effectLst/>
           <a:effectLst>
             <a:outerShdw blurRad="90000" dist="38000" dir="5400000" rotWithShape="0">
               <a:srgbClr val="20242E">
@@ -17441,7 +17401,6 @@
               <a:srgbClr val="E4E3DE"/>
             </a:solidFill>
           </a:ln>
-          <a:effectLst/>
           <a:effectLst>
             <a:outerShdw blurRad="90000" dist="38000" dir="5400000" rotWithShape="0">
               <a:srgbClr val="20242E">
@@ -17610,7 +17569,6 @@
               <a:srgbClr val="E4E3DE"/>
             </a:solidFill>
           </a:ln>
-          <a:effectLst/>
           <a:effectLst>
             <a:outerShdw blurRad="90000" dist="38000" dir="5400000" rotWithShape="0">
               <a:srgbClr val="20242E">
@@ -17779,7 +17737,6 @@
               <a:srgbClr val="E4E3DE"/>
             </a:solidFill>
           </a:ln>
-          <a:effectLst/>
           <a:effectLst>
             <a:outerShdw blurRad="90000" dist="38000" dir="5400000" rotWithShape="0">
               <a:srgbClr val="20242E">
@@ -17948,7 +17905,6 @@
               <a:srgbClr val="E4E3DE"/>
             </a:solidFill>
           </a:ln>
-          <a:effectLst/>
           <a:effectLst>
             <a:outerShdw blurRad="90000" dist="38000" dir="5400000" rotWithShape="0">
               <a:srgbClr val="20242E">
@@ -18117,7 +18073,6 @@
               <a:srgbClr val="E4E3DE"/>
             </a:solidFill>
           </a:ln>
-          <a:effectLst/>
           <a:effectLst>
             <a:outerShdw blurRad="90000" dist="38000" dir="5400000" rotWithShape="0">
               <a:srgbClr val="20242E">
@@ -18286,7 +18241,6 @@
               <a:srgbClr val="E4E3DE"/>
             </a:solidFill>
           </a:ln>
-          <a:effectLst/>
           <a:effectLst>
             <a:outerShdw blurRad="90000" dist="38000" dir="5400000" rotWithShape="0">
               <a:srgbClr val="20242E">
@@ -18455,7 +18409,6 @@
               <a:srgbClr val="E4E3DE"/>
             </a:solidFill>
           </a:ln>
-          <a:effectLst/>
           <a:effectLst>
             <a:outerShdw blurRad="90000" dist="38000" dir="5400000" rotWithShape="0">
               <a:srgbClr val="20242E">
@@ -18624,7 +18577,6 @@
               <a:srgbClr val="E4E3DE"/>
             </a:solidFill>
           </a:ln>
-          <a:effectLst/>
           <a:effectLst>
             <a:outerShdw blurRad="90000" dist="38000" dir="5400000" rotWithShape="0">
               <a:srgbClr val="20242E">
@@ -19373,7 +19325,6 @@
               <a:srgbClr val="E4E3DE"/>
             </a:solidFill>
           </a:ln>
-          <a:effectLst/>
           <a:effectLst>
             <a:outerShdw blurRad="90000" dist="38000" dir="5400000" rotWithShape="0">
               <a:srgbClr val="20242E">
@@ -21428,7 +21379,6 @@
               <a:srgbClr val="D64550"/>
             </a:solidFill>
           </a:ln>
-          <a:effectLst/>
           <a:effectLst>
             <a:outerShdw blurRad="90000" dist="38000" dir="5400000" rotWithShape="0">
               <a:srgbClr val="20242E">
@@ -22256,7 +22206,6 @@
               <a:srgbClr val="E4E3DE"/>
             </a:solidFill>
           </a:ln>
-          <a:effectLst/>
           <a:effectLst>
             <a:outerShdw blurRad="90000" dist="38000" dir="5400000" rotWithShape="0">
               <a:srgbClr val="20242E">
@@ -22566,7 +22515,6 @@
               <a:srgbClr val="E4E3DE"/>
             </a:solidFill>
           </a:ln>
-          <a:effectLst/>
           <a:effectLst>
             <a:outerShdw blurRad="90000" dist="38000" dir="5400000" rotWithShape="0">
               <a:srgbClr val="20242E">
@@ -22858,7 +22806,6 @@
               <a:srgbClr val="D64550"/>
             </a:solidFill>
           </a:ln>
-          <a:effectLst/>
           <a:effectLst>
             <a:outerShdw blurRad="90000" dist="38000" dir="5400000" rotWithShape="0">
               <a:srgbClr val="20242E">
@@ -24720,7 +24667,6 @@
               <a:srgbClr val="A8323B"/>
             </a:solidFill>
           </a:ln>
-          <a:effectLst/>
           <a:effectLst>
             <a:outerShdw blurRad="90000" dist="38000" dir="5400000" rotWithShape="0">
               <a:srgbClr val="20242E">
@@ -25204,7 +25150,6 @@
               <a:srgbClr val="A8323B"/>
             </a:solidFill>
           </a:ln>
-          <a:effectLst/>
           <a:effectLst>
             <a:outerShdw blurRad="90000" dist="38000" dir="5400000" rotWithShape="0">
               <a:srgbClr val="20242E">
@@ -25688,7 +25633,6 @@
               <a:srgbClr val="A8323B"/>
             </a:solidFill>
           </a:ln>
-          <a:effectLst/>
           <a:effectLst>
             <a:outerShdw blurRad="90000" dist="38000" dir="5400000" rotWithShape="0">
               <a:srgbClr val="20242E">
@@ -25784,7 +25728,6 @@
               <a:srgbClr val="D64550"/>
             </a:solidFill>
           </a:ln>
-          <a:effectLst/>
           <a:effectLst>
             <a:outerShdw blurRad="90000" dist="38000" dir="5400000" rotWithShape="0">
               <a:srgbClr val="20242E">
@@ -27240,7 +27183,6 @@
               <a:srgbClr val="E4E3DE"/>
             </a:solidFill>
           </a:ln>
-          <a:effectLst/>
           <a:effectLst>
             <a:outerShdw blurRad="90000" dist="38000" dir="5400000" rotWithShape="0">
               <a:srgbClr val="20242E">
@@ -27664,7 +27606,6 @@
               <a:srgbClr val="E4E3DE"/>
             </a:solidFill>
           </a:ln>
-          <a:effectLst/>
           <a:effectLst>
             <a:outerShdw blurRad="90000" dist="38000" dir="5400000" rotWithShape="0">
               <a:srgbClr val="20242E">
@@ -28088,7 +28029,6 @@
               <a:srgbClr val="E4E3DE"/>
             </a:solidFill>
           </a:ln>
-          <a:effectLst/>
           <a:effectLst>
             <a:outerShdw blurRad="90000" dist="38000" dir="5400000" rotWithShape="0">
               <a:srgbClr val="20242E">
@@ -29040,7 +28980,6 @@
               <a:srgbClr val="D64550"/>
             </a:solidFill>
           </a:ln>
-          <a:effectLst/>
           <a:effectLst>
             <a:outerShdw blurRad="90000" dist="38000" dir="5400000" rotWithShape="0">
               <a:srgbClr val="20242E">
@@ -29410,7 +29349,6 @@
               <a:srgbClr val="E4E3DE"/>
             </a:solidFill>
           </a:ln>
-          <a:effectLst/>
           <a:effectLst>
             <a:outerShdw blurRad="90000" dist="38000" dir="5400000" rotWithShape="0">
               <a:srgbClr val="20242E">
@@ -30862,7 +30800,6 @@
               <a:srgbClr val="E4E3DE"/>
             </a:solidFill>
           </a:ln>
-          <a:effectLst/>
           <a:effectLst>
             <a:outerShdw blurRad="90000" dist="38000" dir="5400000" rotWithShape="0">
               <a:srgbClr val="20242E">
@@ -31764,7 +31701,6 @@
               <a:srgbClr val="D64550"/>
             </a:solidFill>
           </a:ln>
-          <a:effectLst/>
           <a:effectLst>
             <a:outerShdw blurRad="90000" dist="38000" dir="5400000" rotWithShape="0">
               <a:srgbClr val="20242E">
@@ -32696,7 +32632,6 @@
               <a:srgbClr val="E4E3DE"/>
             </a:solidFill>
           </a:ln>
-          <a:effectLst/>
           <a:effectLst>
             <a:outerShdw blurRad="90000" dist="38000" dir="5400000" rotWithShape="0">
               <a:srgbClr val="20242E">
@@ -33048,7 +32983,6 @@
               <a:srgbClr val="E4E3DE"/>
             </a:solidFill>
           </a:ln>
-          <a:effectLst/>
           <a:effectLst>
             <a:outerShdw blurRad="90000" dist="38000" dir="5400000" rotWithShape="0">
               <a:srgbClr val="20242E">
@@ -33418,7 +33352,6 @@
               <a:srgbClr val="DC2626"/>
             </a:solidFill>
           </a:ln>
-          <a:effectLst/>
           <a:effectLst>
             <a:outerShdw blurRad="90000" dist="38000" dir="5400000" rotWithShape="0">
               <a:srgbClr val="20242E">
@@ -33622,7 +33555,6 @@
               <a:srgbClr val="DC2626"/>
             </a:solidFill>
           </a:ln>
-          <a:effectLst/>
           <a:effectLst>
             <a:outerShdw blurRad="90000" dist="38000" dir="5400000" rotWithShape="0">
               <a:srgbClr val="20242E">
@@ -33907,7 +33839,6 @@
               <a:srgbClr val="D64550"/>
             </a:solidFill>
           </a:ln>
-          <a:effectLst/>
           <a:effectLst>
             <a:outerShdw blurRad="90000" dist="38000" dir="5400000" rotWithShape="0">
               <a:srgbClr val="20242E">
